--- a/public/videos/repositories/cat-cafe-etc/cat-cafe-etc-tech-preview.pptx
+++ b/public/videos/repositories/cat-cafe-etc/cat-cafe-etc-tech-preview.pptx
@@ -134,7 +134,7 @@
           <p:cNvPr id="2" name="タイトル 1">
             <a:extLst>
               <a:ext uri="{FF2B5EF4-FFF2-40B4-BE49-F238E27FC236}">
-                <a16:creationId xmlns:a16="http://schemas.microsoft.com/office/drawing/2014/main" id="{D55BDAC2-3ADA-5574-9A49-74E881D89055}"/>
+                <a16:creationId xmlns:a16="http://schemas.microsoft.com/office/drawing/2014/main" id="{19CE491A-A7AA-99CC-EC28-6DDC27BDA203}"/>
               </a:ext>
             </a:extLst>
           </p:cNvPr>
@@ -171,7 +171,7 @@
           <p:cNvPr id="3" name="字幕 2">
             <a:extLst>
               <a:ext uri="{FF2B5EF4-FFF2-40B4-BE49-F238E27FC236}">
-                <a16:creationId xmlns:a16="http://schemas.microsoft.com/office/drawing/2014/main" id="{A60A400B-EBB7-094A-1C71-4539C45414E9}"/>
+                <a16:creationId xmlns:a16="http://schemas.microsoft.com/office/drawing/2014/main" id="{9389D485-9AF0-E325-36C0-F091AA870A91}"/>
               </a:ext>
             </a:extLst>
           </p:cNvPr>
@@ -241,7 +241,7 @@
           <p:cNvPr id="4" name="日付プレースホルダー 3">
             <a:extLst>
               <a:ext uri="{FF2B5EF4-FFF2-40B4-BE49-F238E27FC236}">
-                <a16:creationId xmlns:a16="http://schemas.microsoft.com/office/drawing/2014/main" id="{E69569BB-4A7B-B0CA-FFF3-E6C3116A0D14}"/>
+                <a16:creationId xmlns:a16="http://schemas.microsoft.com/office/drawing/2014/main" id="{B6F9596D-27BB-F602-466B-6827A8521270}"/>
               </a:ext>
             </a:extLst>
           </p:cNvPr>
@@ -257,7 +257,7 @@
           <a:bodyPr/>
           <a:lstStyle/>
           <a:p>
-            <a:fld id="{8F1E2D44-5919-4708-808C-4760681CF9E9}" type="datetimeFigureOut">
+            <a:fld id="{C1342AAE-2735-4B0F-A7F3-79A6D4759B7F}" type="datetimeFigureOut">
               <a:rPr kumimoji="1" lang="ja-JP" altLang="en-US" smtClean="0"/>
               <a:t>2026/7/30</a:t>
             </a:fld>
@@ -270,7 +270,7 @@
           <p:cNvPr id="5" name="フッター プレースホルダー 4">
             <a:extLst>
               <a:ext uri="{FF2B5EF4-FFF2-40B4-BE49-F238E27FC236}">
-                <a16:creationId xmlns:a16="http://schemas.microsoft.com/office/drawing/2014/main" id="{73B76A79-84D5-0070-25AF-EC4CC9C8A9E1}"/>
+                <a16:creationId xmlns:a16="http://schemas.microsoft.com/office/drawing/2014/main" id="{50CCDDA7-F455-5187-544C-A8832B917DC8}"/>
               </a:ext>
             </a:extLst>
           </p:cNvPr>
@@ -295,7 +295,7 @@
           <p:cNvPr id="6" name="スライド番号プレースホルダー 5">
             <a:extLst>
               <a:ext uri="{FF2B5EF4-FFF2-40B4-BE49-F238E27FC236}">
-                <a16:creationId xmlns:a16="http://schemas.microsoft.com/office/drawing/2014/main" id="{7CD9432C-6821-2EB3-0C80-0E51659449E4}"/>
+                <a16:creationId xmlns:a16="http://schemas.microsoft.com/office/drawing/2014/main" id="{0FE0C55C-4E60-999C-B179-90974E6B9646}"/>
               </a:ext>
             </a:extLst>
           </p:cNvPr>
@@ -311,7 +311,7 @@
           <a:bodyPr/>
           <a:lstStyle/>
           <a:p>
-            <a:fld id="{573A9620-509B-40D3-8AD7-606639AE1E3B}" type="slidenum">
+            <a:fld id="{57C1FA39-E2D0-4B9A-B360-B0012639F7A1}" type="slidenum">
               <a:rPr kumimoji="1" lang="ja-JP" altLang="en-US" smtClean="0"/>
               <a:t>‹#›</a:t>
             </a:fld>
@@ -322,7 +322,7 @@
     </p:spTree>
     <p:extLst>
       <p:ext uri="{BB962C8B-B14F-4D97-AF65-F5344CB8AC3E}">
-        <p14:creationId xmlns:p14="http://schemas.microsoft.com/office/powerpoint/2010/main" val="2553652595"/>
+        <p14:creationId xmlns:p14="http://schemas.microsoft.com/office/powerpoint/2010/main" val="885265290"/>
       </p:ext>
     </p:extLst>
   </p:cSld>
@@ -354,7 +354,7 @@
           <p:cNvPr id="2" name="タイトル 1">
             <a:extLst>
               <a:ext uri="{FF2B5EF4-FFF2-40B4-BE49-F238E27FC236}">
-                <a16:creationId xmlns:a16="http://schemas.microsoft.com/office/drawing/2014/main" id="{475626CB-E2D8-7A12-58EB-B59A0F98B0A1}"/>
+                <a16:creationId xmlns:a16="http://schemas.microsoft.com/office/drawing/2014/main" id="{5E677B72-1A8C-2708-89E0-63AE37A6730E}"/>
               </a:ext>
             </a:extLst>
           </p:cNvPr>
@@ -382,7 +382,7 @@
           <p:cNvPr id="3" name="縦書きテキスト プレースホルダー 2">
             <a:extLst>
               <a:ext uri="{FF2B5EF4-FFF2-40B4-BE49-F238E27FC236}">
-                <a16:creationId xmlns:a16="http://schemas.microsoft.com/office/drawing/2014/main" id="{B009F191-B84B-DE62-400E-0F710712AB7E}"/>
+                <a16:creationId xmlns:a16="http://schemas.microsoft.com/office/drawing/2014/main" id="{2C145A66-A5E6-06F8-02DE-63A1909401F3}"/>
               </a:ext>
             </a:extLst>
           </p:cNvPr>
@@ -471,7 +471,7 @@
           <p:cNvPr id="4" name="日付プレースホルダー 3">
             <a:extLst>
               <a:ext uri="{FF2B5EF4-FFF2-40B4-BE49-F238E27FC236}">
-                <a16:creationId xmlns:a16="http://schemas.microsoft.com/office/drawing/2014/main" id="{08002AFB-0E7C-38A7-FF28-0CAC5E260AA9}"/>
+                <a16:creationId xmlns:a16="http://schemas.microsoft.com/office/drawing/2014/main" id="{D8E245C0-0E2A-9C97-B4CC-984D755F26AB}"/>
               </a:ext>
             </a:extLst>
           </p:cNvPr>
@@ -487,7 +487,7 @@
           <a:bodyPr/>
           <a:lstStyle/>
           <a:p>
-            <a:fld id="{8F1E2D44-5919-4708-808C-4760681CF9E9}" type="datetimeFigureOut">
+            <a:fld id="{C1342AAE-2735-4B0F-A7F3-79A6D4759B7F}" type="datetimeFigureOut">
               <a:rPr kumimoji="1" lang="ja-JP" altLang="en-US" smtClean="0"/>
               <a:t>2026/7/30</a:t>
             </a:fld>
@@ -500,7 +500,7 @@
           <p:cNvPr id="5" name="フッター プレースホルダー 4">
             <a:extLst>
               <a:ext uri="{FF2B5EF4-FFF2-40B4-BE49-F238E27FC236}">
-                <a16:creationId xmlns:a16="http://schemas.microsoft.com/office/drawing/2014/main" id="{0533F6A5-646D-5850-872D-F5903DD2E968}"/>
+                <a16:creationId xmlns:a16="http://schemas.microsoft.com/office/drawing/2014/main" id="{B3D372A1-2CF3-9AB8-24C0-9A96F73CE4B2}"/>
               </a:ext>
             </a:extLst>
           </p:cNvPr>
@@ -525,7 +525,7 @@
           <p:cNvPr id="6" name="スライド番号プレースホルダー 5">
             <a:extLst>
               <a:ext uri="{FF2B5EF4-FFF2-40B4-BE49-F238E27FC236}">
-                <a16:creationId xmlns:a16="http://schemas.microsoft.com/office/drawing/2014/main" id="{EF8A668C-D27A-5993-3872-1FBBD5CABAE4}"/>
+                <a16:creationId xmlns:a16="http://schemas.microsoft.com/office/drawing/2014/main" id="{62FACE60-B028-58CB-3630-F1448B18788E}"/>
               </a:ext>
             </a:extLst>
           </p:cNvPr>
@@ -541,7 +541,7 @@
           <a:bodyPr/>
           <a:lstStyle/>
           <a:p>
-            <a:fld id="{573A9620-509B-40D3-8AD7-606639AE1E3B}" type="slidenum">
+            <a:fld id="{57C1FA39-E2D0-4B9A-B360-B0012639F7A1}" type="slidenum">
               <a:rPr kumimoji="1" lang="ja-JP" altLang="en-US" smtClean="0"/>
               <a:t>‹#›</a:t>
             </a:fld>
@@ -552,7 +552,7 @@
     </p:spTree>
     <p:extLst>
       <p:ext uri="{BB962C8B-B14F-4D97-AF65-F5344CB8AC3E}">
-        <p14:creationId xmlns:p14="http://schemas.microsoft.com/office/powerpoint/2010/main" val="2984043760"/>
+        <p14:creationId xmlns:p14="http://schemas.microsoft.com/office/powerpoint/2010/main" val="3327265692"/>
       </p:ext>
     </p:extLst>
   </p:cSld>
@@ -584,7 +584,7 @@
           <p:cNvPr id="2" name="縦書きタイトル 1">
             <a:extLst>
               <a:ext uri="{FF2B5EF4-FFF2-40B4-BE49-F238E27FC236}">
-                <a16:creationId xmlns:a16="http://schemas.microsoft.com/office/drawing/2014/main" id="{EE1781A5-F695-5401-49EF-7B9C0455C787}"/>
+                <a16:creationId xmlns:a16="http://schemas.microsoft.com/office/drawing/2014/main" id="{F4CCFA1A-E85B-4C75-6164-605F508EC465}"/>
               </a:ext>
             </a:extLst>
           </p:cNvPr>
@@ -617,7 +617,7 @@
           <p:cNvPr id="3" name="縦書きテキスト プレースホルダー 2">
             <a:extLst>
               <a:ext uri="{FF2B5EF4-FFF2-40B4-BE49-F238E27FC236}">
-                <a16:creationId xmlns:a16="http://schemas.microsoft.com/office/drawing/2014/main" id="{2822CAA0-4C00-3D1A-3B21-A2AFD37D640B}"/>
+                <a16:creationId xmlns:a16="http://schemas.microsoft.com/office/drawing/2014/main" id="{7C5A97FD-AB43-BE1A-72A9-936917FE132F}"/>
               </a:ext>
             </a:extLst>
           </p:cNvPr>
@@ -711,7 +711,7 @@
           <p:cNvPr id="4" name="日付プレースホルダー 3">
             <a:extLst>
               <a:ext uri="{FF2B5EF4-FFF2-40B4-BE49-F238E27FC236}">
-                <a16:creationId xmlns:a16="http://schemas.microsoft.com/office/drawing/2014/main" id="{2780B5BD-2170-7DCE-9298-411072FA8544}"/>
+                <a16:creationId xmlns:a16="http://schemas.microsoft.com/office/drawing/2014/main" id="{4562AD9A-01D4-AECF-B40F-09115A1A6656}"/>
               </a:ext>
             </a:extLst>
           </p:cNvPr>
@@ -727,7 +727,7 @@
           <a:bodyPr/>
           <a:lstStyle/>
           <a:p>
-            <a:fld id="{8F1E2D44-5919-4708-808C-4760681CF9E9}" type="datetimeFigureOut">
+            <a:fld id="{C1342AAE-2735-4B0F-A7F3-79A6D4759B7F}" type="datetimeFigureOut">
               <a:rPr kumimoji="1" lang="ja-JP" altLang="en-US" smtClean="0"/>
               <a:t>2026/7/30</a:t>
             </a:fld>
@@ -740,7 +740,7 @@
           <p:cNvPr id="5" name="フッター プレースホルダー 4">
             <a:extLst>
               <a:ext uri="{FF2B5EF4-FFF2-40B4-BE49-F238E27FC236}">
-                <a16:creationId xmlns:a16="http://schemas.microsoft.com/office/drawing/2014/main" id="{301E8624-A1BD-0BB1-F22D-AAE975DE9B6F}"/>
+                <a16:creationId xmlns:a16="http://schemas.microsoft.com/office/drawing/2014/main" id="{58B3C655-DDCE-A2B2-0035-8D771C8FFCF3}"/>
               </a:ext>
             </a:extLst>
           </p:cNvPr>
@@ -765,7 +765,7 @@
           <p:cNvPr id="6" name="スライド番号プレースホルダー 5">
             <a:extLst>
               <a:ext uri="{FF2B5EF4-FFF2-40B4-BE49-F238E27FC236}">
-                <a16:creationId xmlns:a16="http://schemas.microsoft.com/office/drawing/2014/main" id="{BAB3B417-22DD-7D70-EA1B-BF7AB86CB2B4}"/>
+                <a16:creationId xmlns:a16="http://schemas.microsoft.com/office/drawing/2014/main" id="{2F66471A-8751-A071-314E-D42A575594C0}"/>
               </a:ext>
             </a:extLst>
           </p:cNvPr>
@@ -781,7 +781,7 @@
           <a:bodyPr/>
           <a:lstStyle/>
           <a:p>
-            <a:fld id="{573A9620-509B-40D3-8AD7-606639AE1E3B}" type="slidenum">
+            <a:fld id="{57C1FA39-E2D0-4B9A-B360-B0012639F7A1}" type="slidenum">
               <a:rPr kumimoji="1" lang="ja-JP" altLang="en-US" smtClean="0"/>
               <a:t>‹#›</a:t>
             </a:fld>
@@ -792,7 +792,7 @@
     </p:spTree>
     <p:extLst>
       <p:ext uri="{BB962C8B-B14F-4D97-AF65-F5344CB8AC3E}">
-        <p14:creationId xmlns:p14="http://schemas.microsoft.com/office/powerpoint/2010/main" val="2849107445"/>
+        <p14:creationId xmlns:p14="http://schemas.microsoft.com/office/powerpoint/2010/main" val="60671119"/>
       </p:ext>
     </p:extLst>
   </p:cSld>
@@ -824,7 +824,7 @@
           <p:cNvPr id="2" name="タイトル 1">
             <a:extLst>
               <a:ext uri="{FF2B5EF4-FFF2-40B4-BE49-F238E27FC236}">
-                <a16:creationId xmlns:a16="http://schemas.microsoft.com/office/drawing/2014/main" id="{89B18313-9BEE-F6D7-BE52-625FE44C71E3}"/>
+                <a16:creationId xmlns:a16="http://schemas.microsoft.com/office/drawing/2014/main" id="{9F47E697-DB2D-4A7F-3F27-68FAA8E98A88}"/>
               </a:ext>
             </a:extLst>
           </p:cNvPr>
@@ -852,7 +852,7 @@
           <p:cNvPr id="3" name="コンテンツ プレースホルダー 2">
             <a:extLst>
               <a:ext uri="{FF2B5EF4-FFF2-40B4-BE49-F238E27FC236}">
-                <a16:creationId xmlns:a16="http://schemas.microsoft.com/office/drawing/2014/main" id="{DA354263-2251-4426-26E9-9F935D1173F4}"/>
+                <a16:creationId xmlns:a16="http://schemas.microsoft.com/office/drawing/2014/main" id="{53E0EE9D-4442-2E0D-F9EE-1F50510CBA96}"/>
               </a:ext>
             </a:extLst>
           </p:cNvPr>
@@ -941,7 +941,7 @@
           <p:cNvPr id="4" name="日付プレースホルダー 3">
             <a:extLst>
               <a:ext uri="{FF2B5EF4-FFF2-40B4-BE49-F238E27FC236}">
-                <a16:creationId xmlns:a16="http://schemas.microsoft.com/office/drawing/2014/main" id="{E386C929-933A-689B-5E70-053EC49F1657}"/>
+                <a16:creationId xmlns:a16="http://schemas.microsoft.com/office/drawing/2014/main" id="{DFD5D711-E156-0864-E5E7-C34CF48AB83B}"/>
               </a:ext>
             </a:extLst>
           </p:cNvPr>
@@ -957,7 +957,7 @@
           <a:bodyPr/>
           <a:lstStyle/>
           <a:p>
-            <a:fld id="{8F1E2D44-5919-4708-808C-4760681CF9E9}" type="datetimeFigureOut">
+            <a:fld id="{C1342AAE-2735-4B0F-A7F3-79A6D4759B7F}" type="datetimeFigureOut">
               <a:rPr kumimoji="1" lang="ja-JP" altLang="en-US" smtClean="0"/>
               <a:t>2026/7/30</a:t>
             </a:fld>
@@ -970,7 +970,7 @@
           <p:cNvPr id="5" name="フッター プレースホルダー 4">
             <a:extLst>
               <a:ext uri="{FF2B5EF4-FFF2-40B4-BE49-F238E27FC236}">
-                <a16:creationId xmlns:a16="http://schemas.microsoft.com/office/drawing/2014/main" id="{D3F2BA76-B9F4-175D-3D24-1AE916573FA5}"/>
+                <a16:creationId xmlns:a16="http://schemas.microsoft.com/office/drawing/2014/main" id="{07F1FFF0-8C92-224C-93F9-CFF5591351DE}"/>
               </a:ext>
             </a:extLst>
           </p:cNvPr>
@@ -995,7 +995,7 @@
           <p:cNvPr id="6" name="スライド番号プレースホルダー 5">
             <a:extLst>
               <a:ext uri="{FF2B5EF4-FFF2-40B4-BE49-F238E27FC236}">
-                <a16:creationId xmlns:a16="http://schemas.microsoft.com/office/drawing/2014/main" id="{A6E12551-A2CA-4EC0-CAC2-4435512AE20E}"/>
+                <a16:creationId xmlns:a16="http://schemas.microsoft.com/office/drawing/2014/main" id="{FCEEF296-2BFF-783B-9F0D-E81B941EFCF9}"/>
               </a:ext>
             </a:extLst>
           </p:cNvPr>
@@ -1011,7 +1011,7 @@
           <a:bodyPr/>
           <a:lstStyle/>
           <a:p>
-            <a:fld id="{573A9620-509B-40D3-8AD7-606639AE1E3B}" type="slidenum">
+            <a:fld id="{57C1FA39-E2D0-4B9A-B360-B0012639F7A1}" type="slidenum">
               <a:rPr kumimoji="1" lang="ja-JP" altLang="en-US" smtClean="0"/>
               <a:t>‹#›</a:t>
             </a:fld>
@@ -1022,7 +1022,7 @@
     </p:spTree>
     <p:extLst>
       <p:ext uri="{BB962C8B-B14F-4D97-AF65-F5344CB8AC3E}">
-        <p14:creationId xmlns:p14="http://schemas.microsoft.com/office/powerpoint/2010/main" val="1504016993"/>
+        <p14:creationId xmlns:p14="http://schemas.microsoft.com/office/powerpoint/2010/main" val="1134017898"/>
       </p:ext>
     </p:extLst>
   </p:cSld>
@@ -1054,7 +1054,7 @@
           <p:cNvPr id="2" name="タイトル 1">
             <a:extLst>
               <a:ext uri="{FF2B5EF4-FFF2-40B4-BE49-F238E27FC236}">
-                <a16:creationId xmlns:a16="http://schemas.microsoft.com/office/drawing/2014/main" id="{6CD6C007-9728-9900-1B48-6F1FBBBAC22E}"/>
+                <a16:creationId xmlns:a16="http://schemas.microsoft.com/office/drawing/2014/main" id="{9759A9CB-8C26-6FFB-20C0-A0B19184E3F6}"/>
               </a:ext>
             </a:extLst>
           </p:cNvPr>
@@ -1091,7 +1091,7 @@
           <p:cNvPr id="3" name="テキスト プレースホルダー 2">
             <a:extLst>
               <a:ext uri="{FF2B5EF4-FFF2-40B4-BE49-F238E27FC236}">
-                <a16:creationId xmlns:a16="http://schemas.microsoft.com/office/drawing/2014/main" id="{189D01E6-BE14-E5EB-B149-F6520D7ABB66}"/>
+                <a16:creationId xmlns:a16="http://schemas.microsoft.com/office/drawing/2014/main" id="{C37A796E-2213-F5ED-0F97-5C293A868C71}"/>
               </a:ext>
             </a:extLst>
           </p:cNvPr>
@@ -1216,7 +1216,7 @@
           <p:cNvPr id="4" name="日付プレースホルダー 3">
             <a:extLst>
               <a:ext uri="{FF2B5EF4-FFF2-40B4-BE49-F238E27FC236}">
-                <a16:creationId xmlns:a16="http://schemas.microsoft.com/office/drawing/2014/main" id="{B99553FE-BEF1-8CFD-D906-987220AAC2A4}"/>
+                <a16:creationId xmlns:a16="http://schemas.microsoft.com/office/drawing/2014/main" id="{00D3390F-F834-C7B6-6959-EEF1FE339CC0}"/>
               </a:ext>
             </a:extLst>
           </p:cNvPr>
@@ -1232,7 +1232,7 @@
           <a:bodyPr/>
           <a:lstStyle/>
           <a:p>
-            <a:fld id="{8F1E2D44-5919-4708-808C-4760681CF9E9}" type="datetimeFigureOut">
+            <a:fld id="{C1342AAE-2735-4B0F-A7F3-79A6D4759B7F}" type="datetimeFigureOut">
               <a:rPr kumimoji="1" lang="ja-JP" altLang="en-US" smtClean="0"/>
               <a:t>2026/7/30</a:t>
             </a:fld>
@@ -1245,7 +1245,7 @@
           <p:cNvPr id="5" name="フッター プレースホルダー 4">
             <a:extLst>
               <a:ext uri="{FF2B5EF4-FFF2-40B4-BE49-F238E27FC236}">
-                <a16:creationId xmlns:a16="http://schemas.microsoft.com/office/drawing/2014/main" id="{442E3B3E-088D-971D-82DD-F3B06B100D2B}"/>
+                <a16:creationId xmlns:a16="http://schemas.microsoft.com/office/drawing/2014/main" id="{00F58986-D4F8-B781-2411-0EE008D4D3FE}"/>
               </a:ext>
             </a:extLst>
           </p:cNvPr>
@@ -1270,7 +1270,7 @@
           <p:cNvPr id="6" name="スライド番号プレースホルダー 5">
             <a:extLst>
               <a:ext uri="{FF2B5EF4-FFF2-40B4-BE49-F238E27FC236}">
-                <a16:creationId xmlns:a16="http://schemas.microsoft.com/office/drawing/2014/main" id="{2759CB48-770A-21DE-0B02-F56EFB2CCE3E}"/>
+                <a16:creationId xmlns:a16="http://schemas.microsoft.com/office/drawing/2014/main" id="{05F38F55-4434-B255-6CB2-D4D93BB73C7F}"/>
               </a:ext>
             </a:extLst>
           </p:cNvPr>
@@ -1286,7 +1286,7 @@
           <a:bodyPr/>
           <a:lstStyle/>
           <a:p>
-            <a:fld id="{573A9620-509B-40D3-8AD7-606639AE1E3B}" type="slidenum">
+            <a:fld id="{57C1FA39-E2D0-4B9A-B360-B0012639F7A1}" type="slidenum">
               <a:rPr kumimoji="1" lang="ja-JP" altLang="en-US" smtClean="0"/>
               <a:t>‹#›</a:t>
             </a:fld>
@@ -1297,7 +1297,7 @@
     </p:spTree>
     <p:extLst>
       <p:ext uri="{BB962C8B-B14F-4D97-AF65-F5344CB8AC3E}">
-        <p14:creationId xmlns:p14="http://schemas.microsoft.com/office/powerpoint/2010/main" val="1885772099"/>
+        <p14:creationId xmlns:p14="http://schemas.microsoft.com/office/powerpoint/2010/main" val="451536485"/>
       </p:ext>
     </p:extLst>
   </p:cSld>
@@ -1329,7 +1329,7 @@
           <p:cNvPr id="2" name="タイトル 1">
             <a:extLst>
               <a:ext uri="{FF2B5EF4-FFF2-40B4-BE49-F238E27FC236}">
-                <a16:creationId xmlns:a16="http://schemas.microsoft.com/office/drawing/2014/main" id="{47180093-DA54-E29B-2DDF-6405BC2DB3E8}"/>
+                <a16:creationId xmlns:a16="http://schemas.microsoft.com/office/drawing/2014/main" id="{1240350B-6B0C-2350-3AC4-745845C5D3FD}"/>
               </a:ext>
             </a:extLst>
           </p:cNvPr>
@@ -1357,7 +1357,7 @@
           <p:cNvPr id="3" name="コンテンツ プレースホルダー 2">
             <a:extLst>
               <a:ext uri="{FF2B5EF4-FFF2-40B4-BE49-F238E27FC236}">
-                <a16:creationId xmlns:a16="http://schemas.microsoft.com/office/drawing/2014/main" id="{53047D4B-0A3C-A353-62A4-106BFC75F5BC}"/>
+                <a16:creationId xmlns:a16="http://schemas.microsoft.com/office/drawing/2014/main" id="{F539AC1A-8071-F915-75A2-0405F867EBB2}"/>
               </a:ext>
             </a:extLst>
           </p:cNvPr>
@@ -1451,7 +1451,7 @@
           <p:cNvPr id="4" name="コンテンツ プレースホルダー 3">
             <a:extLst>
               <a:ext uri="{FF2B5EF4-FFF2-40B4-BE49-F238E27FC236}">
-                <a16:creationId xmlns:a16="http://schemas.microsoft.com/office/drawing/2014/main" id="{B7E9EA62-89A4-762A-89A0-34A4B2C92658}"/>
+                <a16:creationId xmlns:a16="http://schemas.microsoft.com/office/drawing/2014/main" id="{87084B0D-3D4D-E063-FD1A-8AE94E5EE098}"/>
               </a:ext>
             </a:extLst>
           </p:cNvPr>
@@ -1545,7 +1545,7 @@
           <p:cNvPr id="5" name="日付プレースホルダー 4">
             <a:extLst>
               <a:ext uri="{FF2B5EF4-FFF2-40B4-BE49-F238E27FC236}">
-                <a16:creationId xmlns:a16="http://schemas.microsoft.com/office/drawing/2014/main" id="{5F0FB920-AC9E-C6F7-2487-A67F761F701B}"/>
+                <a16:creationId xmlns:a16="http://schemas.microsoft.com/office/drawing/2014/main" id="{CE4033B0-0F3F-6DB8-0124-78153AB2AA59}"/>
               </a:ext>
             </a:extLst>
           </p:cNvPr>
@@ -1561,7 +1561,7 @@
           <a:bodyPr/>
           <a:lstStyle/>
           <a:p>
-            <a:fld id="{8F1E2D44-5919-4708-808C-4760681CF9E9}" type="datetimeFigureOut">
+            <a:fld id="{C1342AAE-2735-4B0F-A7F3-79A6D4759B7F}" type="datetimeFigureOut">
               <a:rPr kumimoji="1" lang="ja-JP" altLang="en-US" smtClean="0"/>
               <a:t>2026/7/30</a:t>
             </a:fld>
@@ -1574,7 +1574,7 @@
           <p:cNvPr id="6" name="フッター プレースホルダー 5">
             <a:extLst>
               <a:ext uri="{FF2B5EF4-FFF2-40B4-BE49-F238E27FC236}">
-                <a16:creationId xmlns:a16="http://schemas.microsoft.com/office/drawing/2014/main" id="{03D85DAE-A035-31E9-6C49-E7D4C694FEF5}"/>
+                <a16:creationId xmlns:a16="http://schemas.microsoft.com/office/drawing/2014/main" id="{CDB0FE64-E8C9-1005-4F5D-AD235EEC25AB}"/>
               </a:ext>
             </a:extLst>
           </p:cNvPr>
@@ -1599,7 +1599,7 @@
           <p:cNvPr id="7" name="スライド番号プレースホルダー 6">
             <a:extLst>
               <a:ext uri="{FF2B5EF4-FFF2-40B4-BE49-F238E27FC236}">
-                <a16:creationId xmlns:a16="http://schemas.microsoft.com/office/drawing/2014/main" id="{85A47E54-91CA-8395-5F38-DB09CEEEE570}"/>
+                <a16:creationId xmlns:a16="http://schemas.microsoft.com/office/drawing/2014/main" id="{E3067711-8A7D-7F1F-C72D-9325CE7D8DCE}"/>
               </a:ext>
             </a:extLst>
           </p:cNvPr>
@@ -1615,7 +1615,7 @@
           <a:bodyPr/>
           <a:lstStyle/>
           <a:p>
-            <a:fld id="{573A9620-509B-40D3-8AD7-606639AE1E3B}" type="slidenum">
+            <a:fld id="{57C1FA39-E2D0-4B9A-B360-B0012639F7A1}" type="slidenum">
               <a:rPr kumimoji="1" lang="ja-JP" altLang="en-US" smtClean="0"/>
               <a:t>‹#›</a:t>
             </a:fld>
@@ -1626,7 +1626,7 @@
     </p:spTree>
     <p:extLst>
       <p:ext uri="{BB962C8B-B14F-4D97-AF65-F5344CB8AC3E}">
-        <p14:creationId xmlns:p14="http://schemas.microsoft.com/office/powerpoint/2010/main" val="2314209030"/>
+        <p14:creationId xmlns:p14="http://schemas.microsoft.com/office/powerpoint/2010/main" val="1977700794"/>
       </p:ext>
     </p:extLst>
   </p:cSld>
@@ -1658,7 +1658,7 @@
           <p:cNvPr id="2" name="タイトル 1">
             <a:extLst>
               <a:ext uri="{FF2B5EF4-FFF2-40B4-BE49-F238E27FC236}">
-                <a16:creationId xmlns:a16="http://schemas.microsoft.com/office/drawing/2014/main" id="{6CE0C76F-0CCB-DDB6-2843-49EA8C869E73}"/>
+                <a16:creationId xmlns:a16="http://schemas.microsoft.com/office/drawing/2014/main" id="{947FDBF8-62E2-B1C1-0106-9548F8B5EFD0}"/>
               </a:ext>
             </a:extLst>
           </p:cNvPr>
@@ -1691,7 +1691,7 @@
           <p:cNvPr id="3" name="テキスト プレースホルダー 2">
             <a:extLst>
               <a:ext uri="{FF2B5EF4-FFF2-40B4-BE49-F238E27FC236}">
-                <a16:creationId xmlns:a16="http://schemas.microsoft.com/office/drawing/2014/main" id="{F341BEF2-07FB-1CE3-1B44-4C935BC30FE8}"/>
+                <a16:creationId xmlns:a16="http://schemas.microsoft.com/office/drawing/2014/main" id="{B89E2639-1FEC-06D3-F11B-9A2F79B31CA2}"/>
               </a:ext>
             </a:extLst>
           </p:cNvPr>
@@ -1762,7 +1762,7 @@
           <p:cNvPr id="4" name="コンテンツ プレースホルダー 3">
             <a:extLst>
               <a:ext uri="{FF2B5EF4-FFF2-40B4-BE49-F238E27FC236}">
-                <a16:creationId xmlns:a16="http://schemas.microsoft.com/office/drawing/2014/main" id="{74D75FCB-25EB-34B5-F522-5BE7C0343687}"/>
+                <a16:creationId xmlns:a16="http://schemas.microsoft.com/office/drawing/2014/main" id="{48E33924-1162-A4D8-6722-C198F4108EE1}"/>
               </a:ext>
             </a:extLst>
           </p:cNvPr>
@@ -1856,7 +1856,7 @@
           <p:cNvPr id="5" name="テキスト プレースホルダー 4">
             <a:extLst>
               <a:ext uri="{FF2B5EF4-FFF2-40B4-BE49-F238E27FC236}">
-                <a16:creationId xmlns:a16="http://schemas.microsoft.com/office/drawing/2014/main" id="{A5EEEE18-AE0D-8E46-6EAC-E7DFC5414FEF}"/>
+                <a16:creationId xmlns:a16="http://schemas.microsoft.com/office/drawing/2014/main" id="{59D0F96A-9C07-FF50-9894-D4B18AF18FA4}"/>
               </a:ext>
             </a:extLst>
           </p:cNvPr>
@@ -1927,7 +1927,7 @@
           <p:cNvPr id="6" name="コンテンツ プレースホルダー 5">
             <a:extLst>
               <a:ext uri="{FF2B5EF4-FFF2-40B4-BE49-F238E27FC236}">
-                <a16:creationId xmlns:a16="http://schemas.microsoft.com/office/drawing/2014/main" id="{D1E514DA-2234-6413-DC5A-BE41F6FFC1B4}"/>
+                <a16:creationId xmlns:a16="http://schemas.microsoft.com/office/drawing/2014/main" id="{2345CCC6-A5C8-8E81-9546-C962F24D4C2C}"/>
               </a:ext>
             </a:extLst>
           </p:cNvPr>
@@ -2021,7 +2021,7 @@
           <p:cNvPr id="7" name="日付プレースホルダー 6">
             <a:extLst>
               <a:ext uri="{FF2B5EF4-FFF2-40B4-BE49-F238E27FC236}">
-                <a16:creationId xmlns:a16="http://schemas.microsoft.com/office/drawing/2014/main" id="{3733E4F4-E4E6-395E-4183-D0DCCC8093ED}"/>
+                <a16:creationId xmlns:a16="http://schemas.microsoft.com/office/drawing/2014/main" id="{83B74ACD-3970-A1DB-695A-DAEBF1E88110}"/>
               </a:ext>
             </a:extLst>
           </p:cNvPr>
@@ -2037,7 +2037,7 @@
           <a:bodyPr/>
           <a:lstStyle/>
           <a:p>
-            <a:fld id="{8F1E2D44-5919-4708-808C-4760681CF9E9}" type="datetimeFigureOut">
+            <a:fld id="{C1342AAE-2735-4B0F-A7F3-79A6D4759B7F}" type="datetimeFigureOut">
               <a:rPr kumimoji="1" lang="ja-JP" altLang="en-US" smtClean="0"/>
               <a:t>2026/7/30</a:t>
             </a:fld>
@@ -2050,7 +2050,7 @@
           <p:cNvPr id="8" name="フッター プレースホルダー 7">
             <a:extLst>
               <a:ext uri="{FF2B5EF4-FFF2-40B4-BE49-F238E27FC236}">
-                <a16:creationId xmlns:a16="http://schemas.microsoft.com/office/drawing/2014/main" id="{01638E88-02CD-327F-5D17-1D4A4BFCFF39}"/>
+                <a16:creationId xmlns:a16="http://schemas.microsoft.com/office/drawing/2014/main" id="{1A2AB80B-C18F-B089-9154-5FE7A12963E5}"/>
               </a:ext>
             </a:extLst>
           </p:cNvPr>
@@ -2075,7 +2075,7 @@
           <p:cNvPr id="9" name="スライド番号プレースホルダー 8">
             <a:extLst>
               <a:ext uri="{FF2B5EF4-FFF2-40B4-BE49-F238E27FC236}">
-                <a16:creationId xmlns:a16="http://schemas.microsoft.com/office/drawing/2014/main" id="{149D61D5-74E5-AB39-3BE6-23A8E08CE22F}"/>
+                <a16:creationId xmlns:a16="http://schemas.microsoft.com/office/drawing/2014/main" id="{2B507E3E-857B-3208-A3B5-B9400E719649}"/>
               </a:ext>
             </a:extLst>
           </p:cNvPr>
@@ -2091,7 +2091,7 @@
           <a:bodyPr/>
           <a:lstStyle/>
           <a:p>
-            <a:fld id="{573A9620-509B-40D3-8AD7-606639AE1E3B}" type="slidenum">
+            <a:fld id="{57C1FA39-E2D0-4B9A-B360-B0012639F7A1}" type="slidenum">
               <a:rPr kumimoji="1" lang="ja-JP" altLang="en-US" smtClean="0"/>
               <a:t>‹#›</a:t>
             </a:fld>
@@ -2102,7 +2102,7 @@
     </p:spTree>
     <p:extLst>
       <p:ext uri="{BB962C8B-B14F-4D97-AF65-F5344CB8AC3E}">
-        <p14:creationId xmlns:p14="http://schemas.microsoft.com/office/powerpoint/2010/main" val="1141356380"/>
+        <p14:creationId xmlns:p14="http://schemas.microsoft.com/office/powerpoint/2010/main" val="3131888493"/>
       </p:ext>
     </p:extLst>
   </p:cSld>
@@ -2134,7 +2134,7 @@
           <p:cNvPr id="2" name="タイトル 1">
             <a:extLst>
               <a:ext uri="{FF2B5EF4-FFF2-40B4-BE49-F238E27FC236}">
-                <a16:creationId xmlns:a16="http://schemas.microsoft.com/office/drawing/2014/main" id="{6E828224-CFA8-77A1-2440-A95B7D923E57}"/>
+                <a16:creationId xmlns:a16="http://schemas.microsoft.com/office/drawing/2014/main" id="{30B9913A-5F37-4149-E8AE-4606DD63194C}"/>
               </a:ext>
             </a:extLst>
           </p:cNvPr>
@@ -2162,7 +2162,7 @@
           <p:cNvPr id="3" name="日付プレースホルダー 2">
             <a:extLst>
               <a:ext uri="{FF2B5EF4-FFF2-40B4-BE49-F238E27FC236}">
-                <a16:creationId xmlns:a16="http://schemas.microsoft.com/office/drawing/2014/main" id="{E4B2C5EE-5450-6DF1-FD0D-8A8A171990FC}"/>
+                <a16:creationId xmlns:a16="http://schemas.microsoft.com/office/drawing/2014/main" id="{B0F19B60-9E87-A759-4BEB-B014BDB6CD84}"/>
               </a:ext>
             </a:extLst>
           </p:cNvPr>
@@ -2178,7 +2178,7 @@
           <a:bodyPr/>
           <a:lstStyle/>
           <a:p>
-            <a:fld id="{8F1E2D44-5919-4708-808C-4760681CF9E9}" type="datetimeFigureOut">
+            <a:fld id="{C1342AAE-2735-4B0F-A7F3-79A6D4759B7F}" type="datetimeFigureOut">
               <a:rPr kumimoji="1" lang="ja-JP" altLang="en-US" smtClean="0"/>
               <a:t>2026/7/30</a:t>
             </a:fld>
@@ -2191,7 +2191,7 @@
           <p:cNvPr id="4" name="フッター プレースホルダー 3">
             <a:extLst>
               <a:ext uri="{FF2B5EF4-FFF2-40B4-BE49-F238E27FC236}">
-                <a16:creationId xmlns:a16="http://schemas.microsoft.com/office/drawing/2014/main" id="{D420DEE8-1DCB-175E-9A2D-2BE97F1A671D}"/>
+                <a16:creationId xmlns:a16="http://schemas.microsoft.com/office/drawing/2014/main" id="{191B38A3-21C1-C698-2953-99B05E1107F7}"/>
               </a:ext>
             </a:extLst>
           </p:cNvPr>
@@ -2216,7 +2216,7 @@
           <p:cNvPr id="5" name="スライド番号プレースホルダー 4">
             <a:extLst>
               <a:ext uri="{FF2B5EF4-FFF2-40B4-BE49-F238E27FC236}">
-                <a16:creationId xmlns:a16="http://schemas.microsoft.com/office/drawing/2014/main" id="{4BA3F4BA-1351-2EF8-6A69-5E22B8BD521F}"/>
+                <a16:creationId xmlns:a16="http://schemas.microsoft.com/office/drawing/2014/main" id="{58DE911B-8C14-AA20-60BA-BEDFF05231A3}"/>
               </a:ext>
             </a:extLst>
           </p:cNvPr>
@@ -2232,7 +2232,7 @@
           <a:bodyPr/>
           <a:lstStyle/>
           <a:p>
-            <a:fld id="{573A9620-509B-40D3-8AD7-606639AE1E3B}" type="slidenum">
+            <a:fld id="{57C1FA39-E2D0-4B9A-B360-B0012639F7A1}" type="slidenum">
               <a:rPr kumimoji="1" lang="ja-JP" altLang="en-US" smtClean="0"/>
               <a:t>‹#›</a:t>
             </a:fld>
@@ -2243,7 +2243,7 @@
     </p:spTree>
     <p:extLst>
       <p:ext uri="{BB962C8B-B14F-4D97-AF65-F5344CB8AC3E}">
-        <p14:creationId xmlns:p14="http://schemas.microsoft.com/office/powerpoint/2010/main" val="3466869190"/>
+        <p14:creationId xmlns:p14="http://schemas.microsoft.com/office/powerpoint/2010/main" val="2300301442"/>
       </p:ext>
     </p:extLst>
   </p:cSld>
@@ -2275,7 +2275,7 @@
           <p:cNvPr id="2" name="日付プレースホルダー 1">
             <a:extLst>
               <a:ext uri="{FF2B5EF4-FFF2-40B4-BE49-F238E27FC236}">
-                <a16:creationId xmlns:a16="http://schemas.microsoft.com/office/drawing/2014/main" id="{2AAC72D3-99BE-CE43-B155-0CFE9C5E13B6}"/>
+                <a16:creationId xmlns:a16="http://schemas.microsoft.com/office/drawing/2014/main" id="{5E421361-7D4B-893A-C1F3-1EB8DFE6CEC8}"/>
               </a:ext>
             </a:extLst>
           </p:cNvPr>
@@ -2291,7 +2291,7 @@
           <a:bodyPr/>
           <a:lstStyle/>
           <a:p>
-            <a:fld id="{8F1E2D44-5919-4708-808C-4760681CF9E9}" type="datetimeFigureOut">
+            <a:fld id="{C1342AAE-2735-4B0F-A7F3-79A6D4759B7F}" type="datetimeFigureOut">
               <a:rPr kumimoji="1" lang="ja-JP" altLang="en-US" smtClean="0"/>
               <a:t>2026/7/30</a:t>
             </a:fld>
@@ -2304,7 +2304,7 @@
           <p:cNvPr id="3" name="フッター プレースホルダー 2">
             <a:extLst>
               <a:ext uri="{FF2B5EF4-FFF2-40B4-BE49-F238E27FC236}">
-                <a16:creationId xmlns:a16="http://schemas.microsoft.com/office/drawing/2014/main" id="{FBC140E4-AE2D-A6F8-2A3D-A89F97A29549}"/>
+                <a16:creationId xmlns:a16="http://schemas.microsoft.com/office/drawing/2014/main" id="{50B4B001-991C-A73F-DAB4-332BC9E03319}"/>
               </a:ext>
             </a:extLst>
           </p:cNvPr>
@@ -2329,7 +2329,7 @@
           <p:cNvPr id="4" name="スライド番号プレースホルダー 3">
             <a:extLst>
               <a:ext uri="{FF2B5EF4-FFF2-40B4-BE49-F238E27FC236}">
-                <a16:creationId xmlns:a16="http://schemas.microsoft.com/office/drawing/2014/main" id="{C8E43A45-919A-82E5-3F5A-5015B6425E26}"/>
+                <a16:creationId xmlns:a16="http://schemas.microsoft.com/office/drawing/2014/main" id="{750F1098-CC00-F3B2-12C6-2296AF854E7D}"/>
               </a:ext>
             </a:extLst>
           </p:cNvPr>
@@ -2345,7 +2345,7 @@
           <a:bodyPr/>
           <a:lstStyle/>
           <a:p>
-            <a:fld id="{573A9620-509B-40D3-8AD7-606639AE1E3B}" type="slidenum">
+            <a:fld id="{57C1FA39-E2D0-4B9A-B360-B0012639F7A1}" type="slidenum">
               <a:rPr kumimoji="1" lang="ja-JP" altLang="en-US" smtClean="0"/>
               <a:t>‹#›</a:t>
             </a:fld>
@@ -2356,7 +2356,7 @@
     </p:spTree>
     <p:extLst>
       <p:ext uri="{BB962C8B-B14F-4D97-AF65-F5344CB8AC3E}">
-        <p14:creationId xmlns:p14="http://schemas.microsoft.com/office/powerpoint/2010/main" val="4146667606"/>
+        <p14:creationId xmlns:p14="http://schemas.microsoft.com/office/powerpoint/2010/main" val="2181944780"/>
       </p:ext>
     </p:extLst>
   </p:cSld>
@@ -2388,7 +2388,7 @@
           <p:cNvPr id="2" name="タイトル 1">
             <a:extLst>
               <a:ext uri="{FF2B5EF4-FFF2-40B4-BE49-F238E27FC236}">
-                <a16:creationId xmlns:a16="http://schemas.microsoft.com/office/drawing/2014/main" id="{DA9BE6B2-3F07-0541-15EF-232D1002258B}"/>
+                <a16:creationId xmlns:a16="http://schemas.microsoft.com/office/drawing/2014/main" id="{BF9ABED9-3AE6-F156-C95B-FB42A41A2052}"/>
               </a:ext>
             </a:extLst>
           </p:cNvPr>
@@ -2425,7 +2425,7 @@
           <p:cNvPr id="3" name="コンテンツ プレースホルダー 2">
             <a:extLst>
               <a:ext uri="{FF2B5EF4-FFF2-40B4-BE49-F238E27FC236}">
-                <a16:creationId xmlns:a16="http://schemas.microsoft.com/office/drawing/2014/main" id="{F6280C3B-AB87-D0DD-555D-86AFF040AE9B}"/>
+                <a16:creationId xmlns:a16="http://schemas.microsoft.com/office/drawing/2014/main" id="{245E97B0-BCA9-E974-B494-74B940F0A61A}"/>
               </a:ext>
             </a:extLst>
           </p:cNvPr>
@@ -2547,7 +2547,7 @@
           <p:cNvPr id="4" name="テキスト プレースホルダー 3">
             <a:extLst>
               <a:ext uri="{FF2B5EF4-FFF2-40B4-BE49-F238E27FC236}">
-                <a16:creationId xmlns:a16="http://schemas.microsoft.com/office/drawing/2014/main" id="{8017A3AA-68C8-37BC-D2AB-BBFFF724AA62}"/>
+                <a16:creationId xmlns:a16="http://schemas.microsoft.com/office/drawing/2014/main" id="{D5701CBD-7CBD-80A2-DD91-71847654E881}"/>
               </a:ext>
             </a:extLst>
           </p:cNvPr>
@@ -2618,7 +2618,7 @@
           <p:cNvPr id="5" name="日付プレースホルダー 4">
             <a:extLst>
               <a:ext uri="{FF2B5EF4-FFF2-40B4-BE49-F238E27FC236}">
-                <a16:creationId xmlns:a16="http://schemas.microsoft.com/office/drawing/2014/main" id="{A94D53B0-2BCF-D282-AC6C-CE947E5827D3}"/>
+                <a16:creationId xmlns:a16="http://schemas.microsoft.com/office/drawing/2014/main" id="{DDC0CE99-0368-B6FC-1725-E2672D6C4583}"/>
               </a:ext>
             </a:extLst>
           </p:cNvPr>
@@ -2634,7 +2634,7 @@
           <a:bodyPr/>
           <a:lstStyle/>
           <a:p>
-            <a:fld id="{8F1E2D44-5919-4708-808C-4760681CF9E9}" type="datetimeFigureOut">
+            <a:fld id="{C1342AAE-2735-4B0F-A7F3-79A6D4759B7F}" type="datetimeFigureOut">
               <a:rPr kumimoji="1" lang="ja-JP" altLang="en-US" smtClean="0"/>
               <a:t>2026/7/30</a:t>
             </a:fld>
@@ -2647,7 +2647,7 @@
           <p:cNvPr id="6" name="フッター プレースホルダー 5">
             <a:extLst>
               <a:ext uri="{FF2B5EF4-FFF2-40B4-BE49-F238E27FC236}">
-                <a16:creationId xmlns:a16="http://schemas.microsoft.com/office/drawing/2014/main" id="{4E5DE7D3-E0E4-DA46-7460-74860A507FBA}"/>
+                <a16:creationId xmlns:a16="http://schemas.microsoft.com/office/drawing/2014/main" id="{0F9DBA3D-3ABE-7F0F-D9AF-5FE0492EDF51}"/>
               </a:ext>
             </a:extLst>
           </p:cNvPr>
@@ -2672,7 +2672,7 @@
           <p:cNvPr id="7" name="スライド番号プレースホルダー 6">
             <a:extLst>
               <a:ext uri="{FF2B5EF4-FFF2-40B4-BE49-F238E27FC236}">
-                <a16:creationId xmlns:a16="http://schemas.microsoft.com/office/drawing/2014/main" id="{70250164-8E03-86F3-16DF-780A429F9C35}"/>
+                <a16:creationId xmlns:a16="http://schemas.microsoft.com/office/drawing/2014/main" id="{24654C8F-23EF-3894-B051-F62EA4910FFB}"/>
               </a:ext>
             </a:extLst>
           </p:cNvPr>
@@ -2688,7 +2688,7 @@
           <a:bodyPr/>
           <a:lstStyle/>
           <a:p>
-            <a:fld id="{573A9620-509B-40D3-8AD7-606639AE1E3B}" type="slidenum">
+            <a:fld id="{57C1FA39-E2D0-4B9A-B360-B0012639F7A1}" type="slidenum">
               <a:rPr kumimoji="1" lang="ja-JP" altLang="en-US" smtClean="0"/>
               <a:t>‹#›</a:t>
             </a:fld>
@@ -2699,7 +2699,7 @@
     </p:spTree>
     <p:extLst>
       <p:ext uri="{BB962C8B-B14F-4D97-AF65-F5344CB8AC3E}">
-        <p14:creationId xmlns:p14="http://schemas.microsoft.com/office/powerpoint/2010/main" val="2149661327"/>
+        <p14:creationId xmlns:p14="http://schemas.microsoft.com/office/powerpoint/2010/main" val="4127253397"/>
       </p:ext>
     </p:extLst>
   </p:cSld>
@@ -2731,7 +2731,7 @@
           <p:cNvPr id="2" name="タイトル 1">
             <a:extLst>
               <a:ext uri="{FF2B5EF4-FFF2-40B4-BE49-F238E27FC236}">
-                <a16:creationId xmlns:a16="http://schemas.microsoft.com/office/drawing/2014/main" id="{EBCF0FDA-0ADB-F5E7-9B2D-DC14D5EA0A48}"/>
+                <a16:creationId xmlns:a16="http://schemas.microsoft.com/office/drawing/2014/main" id="{5B9A2180-352B-82F3-4A67-6020CA747A06}"/>
               </a:ext>
             </a:extLst>
           </p:cNvPr>
@@ -2768,7 +2768,7 @@
           <p:cNvPr id="3" name="図プレースホルダー 2">
             <a:extLst>
               <a:ext uri="{FF2B5EF4-FFF2-40B4-BE49-F238E27FC236}">
-                <a16:creationId xmlns:a16="http://schemas.microsoft.com/office/drawing/2014/main" id="{FDCF67A1-8E7E-6B91-BC75-01225BF61E54}"/>
+                <a16:creationId xmlns:a16="http://schemas.microsoft.com/office/drawing/2014/main" id="{5A76826A-2F85-5DDC-2FD8-FC62BC556A9D}"/>
               </a:ext>
             </a:extLst>
           </p:cNvPr>
@@ -2835,7 +2835,7 @@
           <p:cNvPr id="4" name="テキスト プレースホルダー 3">
             <a:extLst>
               <a:ext uri="{FF2B5EF4-FFF2-40B4-BE49-F238E27FC236}">
-                <a16:creationId xmlns:a16="http://schemas.microsoft.com/office/drawing/2014/main" id="{E2411862-67FC-FE9D-0823-7905428E4D65}"/>
+                <a16:creationId xmlns:a16="http://schemas.microsoft.com/office/drawing/2014/main" id="{2EC75424-763D-342C-C9F4-D9508965667A}"/>
               </a:ext>
             </a:extLst>
           </p:cNvPr>
@@ -2906,7 +2906,7 @@
           <p:cNvPr id="5" name="日付プレースホルダー 4">
             <a:extLst>
               <a:ext uri="{FF2B5EF4-FFF2-40B4-BE49-F238E27FC236}">
-                <a16:creationId xmlns:a16="http://schemas.microsoft.com/office/drawing/2014/main" id="{94AD3D1E-91A9-D1DD-2FE7-DECBD97D36FE}"/>
+                <a16:creationId xmlns:a16="http://schemas.microsoft.com/office/drawing/2014/main" id="{58C8F757-C0C4-1BFC-6F25-7872DCDBFB30}"/>
               </a:ext>
             </a:extLst>
           </p:cNvPr>
@@ -2922,7 +2922,7 @@
           <a:bodyPr/>
           <a:lstStyle/>
           <a:p>
-            <a:fld id="{8F1E2D44-5919-4708-808C-4760681CF9E9}" type="datetimeFigureOut">
+            <a:fld id="{C1342AAE-2735-4B0F-A7F3-79A6D4759B7F}" type="datetimeFigureOut">
               <a:rPr kumimoji="1" lang="ja-JP" altLang="en-US" smtClean="0"/>
               <a:t>2026/7/30</a:t>
             </a:fld>
@@ -2935,7 +2935,7 @@
           <p:cNvPr id="6" name="フッター プレースホルダー 5">
             <a:extLst>
               <a:ext uri="{FF2B5EF4-FFF2-40B4-BE49-F238E27FC236}">
-                <a16:creationId xmlns:a16="http://schemas.microsoft.com/office/drawing/2014/main" id="{69D41539-A68F-F6ED-DCF7-7342897D4360}"/>
+                <a16:creationId xmlns:a16="http://schemas.microsoft.com/office/drawing/2014/main" id="{4DCEE322-76AC-7AF3-9AF4-673CAAE7A2F5}"/>
               </a:ext>
             </a:extLst>
           </p:cNvPr>
@@ -2960,7 +2960,7 @@
           <p:cNvPr id="7" name="スライド番号プレースホルダー 6">
             <a:extLst>
               <a:ext uri="{FF2B5EF4-FFF2-40B4-BE49-F238E27FC236}">
-                <a16:creationId xmlns:a16="http://schemas.microsoft.com/office/drawing/2014/main" id="{206AD56E-5D74-8844-4D43-111DF63E50D2}"/>
+                <a16:creationId xmlns:a16="http://schemas.microsoft.com/office/drawing/2014/main" id="{F257D09E-6276-4EAF-6F81-35495290BBFE}"/>
               </a:ext>
             </a:extLst>
           </p:cNvPr>
@@ -2976,7 +2976,7 @@
           <a:bodyPr/>
           <a:lstStyle/>
           <a:p>
-            <a:fld id="{573A9620-509B-40D3-8AD7-606639AE1E3B}" type="slidenum">
+            <a:fld id="{57C1FA39-E2D0-4B9A-B360-B0012639F7A1}" type="slidenum">
               <a:rPr kumimoji="1" lang="ja-JP" altLang="en-US" smtClean="0"/>
               <a:t>‹#›</a:t>
             </a:fld>
@@ -2987,7 +2987,7 @@
     </p:spTree>
     <p:extLst>
       <p:ext uri="{BB962C8B-B14F-4D97-AF65-F5344CB8AC3E}">
-        <p14:creationId xmlns:p14="http://schemas.microsoft.com/office/powerpoint/2010/main" val="1949262874"/>
+        <p14:creationId xmlns:p14="http://schemas.microsoft.com/office/powerpoint/2010/main" val="3584274847"/>
       </p:ext>
     </p:extLst>
   </p:cSld>
@@ -3024,7 +3024,7 @@
           <p:cNvPr id="2" name="タイトル プレースホルダー 1">
             <a:extLst>
               <a:ext uri="{FF2B5EF4-FFF2-40B4-BE49-F238E27FC236}">
-                <a16:creationId xmlns:a16="http://schemas.microsoft.com/office/drawing/2014/main" id="{B345B6F5-D127-34C7-8861-A6A23B9A3D20}"/>
+                <a16:creationId xmlns:a16="http://schemas.microsoft.com/office/drawing/2014/main" id="{38FDDD04-E475-DBA7-A82D-74FF3E3C5792}"/>
               </a:ext>
             </a:extLst>
           </p:cNvPr>
@@ -3062,7 +3062,7 @@
           <p:cNvPr id="3" name="テキスト プレースホルダー 2">
             <a:extLst>
               <a:ext uri="{FF2B5EF4-FFF2-40B4-BE49-F238E27FC236}">
-                <a16:creationId xmlns:a16="http://schemas.microsoft.com/office/drawing/2014/main" id="{D93E2328-769D-B375-D049-40392607BD80}"/>
+                <a16:creationId xmlns:a16="http://schemas.microsoft.com/office/drawing/2014/main" id="{FA9B30E0-44A5-5540-C27A-CF3A8C239719}"/>
               </a:ext>
             </a:extLst>
           </p:cNvPr>
@@ -3161,7 +3161,7 @@
           <p:cNvPr id="4" name="日付プレースホルダー 3">
             <a:extLst>
               <a:ext uri="{FF2B5EF4-FFF2-40B4-BE49-F238E27FC236}">
-                <a16:creationId xmlns:a16="http://schemas.microsoft.com/office/drawing/2014/main" id="{3B853658-96D9-BF80-3DFD-A1D66918EF8E}"/>
+                <a16:creationId xmlns:a16="http://schemas.microsoft.com/office/drawing/2014/main" id="{86BE50B6-ECAB-9283-EAC2-9C854F26A646}"/>
               </a:ext>
             </a:extLst>
           </p:cNvPr>
@@ -3195,7 +3195,7 @@
             </a:lvl1pPr>
           </a:lstStyle>
           <a:p>
-            <a:fld id="{8F1E2D44-5919-4708-808C-4760681CF9E9}" type="datetimeFigureOut">
+            <a:fld id="{C1342AAE-2735-4B0F-A7F3-79A6D4759B7F}" type="datetimeFigureOut">
               <a:rPr kumimoji="1" lang="ja-JP" altLang="en-US" smtClean="0"/>
               <a:t>2026/7/30</a:t>
             </a:fld>
@@ -3208,7 +3208,7 @@
           <p:cNvPr id="5" name="フッター プレースホルダー 4">
             <a:extLst>
               <a:ext uri="{FF2B5EF4-FFF2-40B4-BE49-F238E27FC236}">
-                <a16:creationId xmlns:a16="http://schemas.microsoft.com/office/drawing/2014/main" id="{A02C501A-BA3C-883F-7149-F975A7E9EB89}"/>
+                <a16:creationId xmlns:a16="http://schemas.microsoft.com/office/drawing/2014/main" id="{8D29E37D-46A7-4DD9-FF5F-13E5936A709D}"/>
               </a:ext>
             </a:extLst>
           </p:cNvPr>
@@ -3251,7 +3251,7 @@
           <p:cNvPr id="6" name="スライド番号プレースホルダー 5">
             <a:extLst>
               <a:ext uri="{FF2B5EF4-FFF2-40B4-BE49-F238E27FC236}">
-                <a16:creationId xmlns:a16="http://schemas.microsoft.com/office/drawing/2014/main" id="{5AB52000-DEF6-B550-9A2E-6F44B17AE350}"/>
+                <a16:creationId xmlns:a16="http://schemas.microsoft.com/office/drawing/2014/main" id="{1C8EEDB5-BA08-FCB3-E885-CA604C293A9C}"/>
               </a:ext>
             </a:extLst>
           </p:cNvPr>
@@ -3285,7 +3285,7 @@
             </a:lvl1pPr>
           </a:lstStyle>
           <a:p>
-            <a:fld id="{573A9620-509B-40D3-8AD7-606639AE1E3B}" type="slidenum">
+            <a:fld id="{57C1FA39-E2D0-4B9A-B360-B0012639F7A1}" type="slidenum">
               <a:rPr kumimoji="1" lang="ja-JP" altLang="en-US" smtClean="0"/>
               <a:t>‹#›</a:t>
             </a:fld>
@@ -3296,7 +3296,7 @@
     </p:spTree>
     <p:extLst>
       <p:ext uri="{BB962C8B-B14F-4D97-AF65-F5344CB8AC3E}">
-        <p14:creationId xmlns:p14="http://schemas.microsoft.com/office/powerpoint/2010/main" val="3245717900"/>
+        <p14:creationId xmlns:p14="http://schemas.microsoft.com/office/powerpoint/2010/main" val="4050053098"/>
       </p:ext>
     </p:extLst>
   </p:cSld>
@@ -3619,7 +3619,7 @@
           <p:cNvPr id="2" name="テキスト ボックス 1">
             <a:extLst>
               <a:ext uri="{FF2B5EF4-FFF2-40B4-BE49-F238E27FC236}">
-                <a16:creationId xmlns:a16="http://schemas.microsoft.com/office/drawing/2014/main" id="{FE9B09A3-1DA6-0354-EA5F-8339A023DEAF}"/>
+                <a16:creationId xmlns:a16="http://schemas.microsoft.com/office/drawing/2014/main" id="{EB0D17BD-BCE8-26D1-2EE6-AF42D04B027F}"/>
               </a:ext>
             </a:extLst>
           </p:cNvPr>
@@ -3665,7 +3665,7 @@
           <p:cNvPr id="3" name="テキスト ボックス 2">
             <a:extLst>
               <a:ext uri="{FF2B5EF4-FFF2-40B4-BE49-F238E27FC236}">
-                <a16:creationId xmlns:a16="http://schemas.microsoft.com/office/drawing/2014/main" id="{2425F88A-3753-7614-86CA-5299A527D059}"/>
+                <a16:creationId xmlns:a16="http://schemas.microsoft.com/office/drawing/2014/main" id="{263D0D58-76A1-6784-5345-7A90F2A9282A}"/>
               </a:ext>
             </a:extLst>
           </p:cNvPr>
@@ -3714,7 +3714,7 @@
           <p:cNvPr id="4" name="テキスト ボックス 3">
             <a:extLst>
               <a:ext uri="{FF2B5EF4-FFF2-40B4-BE49-F238E27FC236}">
-                <a16:creationId xmlns:a16="http://schemas.microsoft.com/office/drawing/2014/main" id="{67C6DAA1-406B-2DAB-895D-1709A438BFF6}"/>
+                <a16:creationId xmlns:a16="http://schemas.microsoft.com/office/drawing/2014/main" id="{B7B905EB-725A-4955-C4C6-049EEAD7E05A}"/>
               </a:ext>
             </a:extLst>
           </p:cNvPr>
@@ -3754,7 +3754,7 @@
           <p:cNvPr id="5" name="テキスト ボックス 4">
             <a:extLst>
               <a:ext uri="{FF2B5EF4-FFF2-40B4-BE49-F238E27FC236}">
-                <a16:creationId xmlns:a16="http://schemas.microsoft.com/office/drawing/2014/main" id="{2EE062FE-FB65-F1F7-7694-E236D01A6DFF}"/>
+                <a16:creationId xmlns:a16="http://schemas.microsoft.com/office/drawing/2014/main" id="{EB059232-15C8-5680-3E5C-C65F1C44B6F2}"/>
               </a:ext>
             </a:extLst>
           </p:cNvPr>
@@ -3801,7 +3801,7 @@
             <a:hlinkClick r:id="" action="ppaction://media"/>
             <a:extLst>
               <a:ext uri="{FF2B5EF4-FFF2-40B4-BE49-F238E27FC236}">
-                <a16:creationId xmlns:a16="http://schemas.microsoft.com/office/drawing/2014/main" id="{63A6BB9F-3977-0CFE-C36D-0651124054FD}"/>
+                <a16:creationId xmlns:a16="http://schemas.microsoft.com/office/drawing/2014/main" id="{D22792F7-AFE7-1140-6F92-274DA92B7B29}"/>
               </a:ext>
             </a:extLst>
           </p:cNvPr>
@@ -3836,7 +3836,7 @@
     </p:spTree>
     <p:extLst>
       <p:ext uri="{BB962C8B-B14F-4D97-AF65-F5344CB8AC3E}">
-        <p14:creationId xmlns:p14="http://schemas.microsoft.com/office/powerpoint/2010/main" val="3705852749"/>
+        <p14:creationId xmlns:p14="http://schemas.microsoft.com/office/powerpoint/2010/main" val="145780840"/>
       </p:ext>
     </p:extLst>
   </p:cSld>
@@ -3960,7 +3960,7 @@
           <p:cNvPr id="2" name="テキスト ボックス 1">
             <a:extLst>
               <a:ext uri="{FF2B5EF4-FFF2-40B4-BE49-F238E27FC236}">
-                <a16:creationId xmlns:a16="http://schemas.microsoft.com/office/drawing/2014/main" id="{AD4A13D4-9B23-9A89-2FDC-A57978688A85}"/>
+                <a16:creationId xmlns:a16="http://schemas.microsoft.com/office/drawing/2014/main" id="{9515790C-5E33-C450-B611-5172F992792B}"/>
               </a:ext>
             </a:extLst>
           </p:cNvPr>
@@ -4006,7 +4006,7 @@
           <p:cNvPr id="3" name="テキスト ボックス 2">
             <a:extLst>
               <a:ext uri="{FF2B5EF4-FFF2-40B4-BE49-F238E27FC236}">
-                <a16:creationId xmlns:a16="http://schemas.microsoft.com/office/drawing/2014/main" id="{6A12CE23-C0E6-2904-D96C-61FAE9EF089B}"/>
+                <a16:creationId xmlns:a16="http://schemas.microsoft.com/office/drawing/2014/main" id="{13D72B8C-78DB-CDCE-1E6E-84CC54857600}"/>
               </a:ext>
             </a:extLst>
           </p:cNvPr>
@@ -4046,7 +4046,7 @@
           <p:cNvPr id="4" name="テキスト ボックス 3">
             <a:extLst>
               <a:ext uri="{FF2B5EF4-FFF2-40B4-BE49-F238E27FC236}">
-                <a16:creationId xmlns:a16="http://schemas.microsoft.com/office/drawing/2014/main" id="{4929CADA-8CE8-1AD1-DF3D-E9DB36DBFA88}"/>
+                <a16:creationId xmlns:a16="http://schemas.microsoft.com/office/drawing/2014/main" id="{AD4FAF5C-6FA2-49D3-2120-BE8B2515286C}"/>
               </a:ext>
             </a:extLst>
           </p:cNvPr>
@@ -4076,14 +4076,17 @@
                 </a:solidFill>
                 <a:latin typeface="Arial" panose="020B0604020202020204" pitchFamily="34" charset="0"/>
               </a:rPr>
-              <a:t>vinext starter A clean full stack starter running on vinext https://github</a:t>
-            </a:r>
-            <a:endParaRPr kumimoji="1" lang="ja-JP" altLang="en-US" sz="2000">
-              <a:solidFill>
-                <a:srgbClr val="333333"/>
-              </a:solidFill>
-              <a:latin typeface="Arial" panose="020B0604020202020204" pitchFamily="34" charset="0"/>
-            </a:endParaRPr>
+              <a:t>Cat Cafe Etc</a:t>
+            </a:r>
+            <a:r>
+              <a:rPr kumimoji="1" lang="ja-JP" altLang="en-US" sz="2000">
+                <a:solidFill>
+                  <a:srgbClr val="333333"/>
+                </a:solidFill>
+                <a:latin typeface="Arial" panose="020B0604020202020204" pitchFamily="34" charset="0"/>
+              </a:rPr>
+              <a:t>の目的、構成、実装を公開コードから確認できるプロジェクトです。</a:t>
+            </a:r>
           </a:p>
         </p:txBody>
       </p:sp>
@@ -4092,7 +4095,7 @@
           <p:cNvPr id="5" name="テキスト ボックス 4">
             <a:extLst>
               <a:ext uri="{FF2B5EF4-FFF2-40B4-BE49-F238E27FC236}">
-                <a16:creationId xmlns:a16="http://schemas.microsoft.com/office/drawing/2014/main" id="{85A7587A-A057-5FE9-CF55-49D174F21220}"/>
+                <a16:creationId xmlns:a16="http://schemas.microsoft.com/office/drawing/2014/main" id="{FF99E2E3-8914-653C-0019-264BA9DCD844}"/>
               </a:ext>
             </a:extLst>
           </p:cNvPr>
@@ -4139,7 +4142,7 @@
             <a:hlinkClick r:id="" action="ppaction://media"/>
             <a:extLst>
               <a:ext uri="{FF2B5EF4-FFF2-40B4-BE49-F238E27FC236}">
-                <a16:creationId xmlns:a16="http://schemas.microsoft.com/office/drawing/2014/main" id="{B485B5D8-A090-C061-551B-57FB04555D8C}"/>
+                <a16:creationId xmlns:a16="http://schemas.microsoft.com/office/drawing/2014/main" id="{4E072786-6EEB-10D4-7436-63488C7CA802}"/>
               </a:ext>
             </a:extLst>
           </p:cNvPr>
@@ -4174,7 +4177,7 @@
     </p:spTree>
     <p:extLst>
       <p:ext uri="{BB962C8B-B14F-4D97-AF65-F5344CB8AC3E}">
-        <p14:creationId xmlns:p14="http://schemas.microsoft.com/office/powerpoint/2010/main" val="2002632677"/>
+        <p14:creationId xmlns:p14="http://schemas.microsoft.com/office/powerpoint/2010/main" val="1020783768"/>
       </p:ext>
     </p:extLst>
   </p:cSld>
@@ -4217,7 +4220,7 @@
                                   <p:childTnLst>
                                     <p:cmd type="call" cmd="playFrom(0.0)">
                                       <p:cBhvr>
-                                        <p:cTn id="6" dur="7955" fill="hold"/>
+                                        <p:cTn id="6" dur="7601" fill="hold"/>
                                         <p:tgtEl>
                                           <p:spTgt spid="6"/>
                                         </p:tgtEl>
@@ -4298,7 +4301,7 @@
           <p:cNvPr id="2" name="テキスト ボックス 1">
             <a:extLst>
               <a:ext uri="{FF2B5EF4-FFF2-40B4-BE49-F238E27FC236}">
-                <a16:creationId xmlns:a16="http://schemas.microsoft.com/office/drawing/2014/main" id="{1723E6A2-41EB-B66F-172A-58527B691AE9}"/>
+                <a16:creationId xmlns:a16="http://schemas.microsoft.com/office/drawing/2014/main" id="{CDBEF725-C6B7-F0AB-430F-562C869950A2}"/>
               </a:ext>
             </a:extLst>
           </p:cNvPr>
@@ -4344,7 +4347,7 @@
           <p:cNvPr id="3" name="テキスト ボックス 2">
             <a:extLst>
               <a:ext uri="{FF2B5EF4-FFF2-40B4-BE49-F238E27FC236}">
-                <a16:creationId xmlns:a16="http://schemas.microsoft.com/office/drawing/2014/main" id="{A16A1089-4284-96C0-A789-4D806998D611}"/>
+                <a16:creationId xmlns:a16="http://schemas.microsoft.com/office/drawing/2014/main" id="{40B09D99-F477-9DCC-6B86-E8541543480E}"/>
               </a:ext>
             </a:extLst>
           </p:cNvPr>
@@ -4384,7 +4387,7 @@
           <p:cNvPr id="4" name="テキスト ボックス 3">
             <a:extLst>
               <a:ext uri="{FF2B5EF4-FFF2-40B4-BE49-F238E27FC236}">
-                <a16:creationId xmlns:a16="http://schemas.microsoft.com/office/drawing/2014/main" id="{4D068C50-31DB-861A-70B8-0DCC471785D1}"/>
+                <a16:creationId xmlns:a16="http://schemas.microsoft.com/office/drawing/2014/main" id="{E368D528-60D1-60AC-4479-1C76C80EB6E4}"/>
               </a:ext>
             </a:extLst>
           </p:cNvPr>
@@ -4461,7 +4464,7 @@
           <p:cNvPr id="5" name="テキスト ボックス 4">
             <a:extLst>
               <a:ext uri="{FF2B5EF4-FFF2-40B4-BE49-F238E27FC236}">
-                <a16:creationId xmlns:a16="http://schemas.microsoft.com/office/drawing/2014/main" id="{546D6F50-E94F-59D8-0ED5-61B0C33D524D}"/>
+                <a16:creationId xmlns:a16="http://schemas.microsoft.com/office/drawing/2014/main" id="{6DBA6147-E52E-BA35-6C8F-477EBACAF744}"/>
               </a:ext>
             </a:extLst>
           </p:cNvPr>
@@ -4508,7 +4511,7 @@
             <a:hlinkClick r:id="" action="ppaction://media"/>
             <a:extLst>
               <a:ext uri="{FF2B5EF4-FFF2-40B4-BE49-F238E27FC236}">
-                <a16:creationId xmlns:a16="http://schemas.microsoft.com/office/drawing/2014/main" id="{F1F207A9-D7BE-048A-1A3D-4B89987C59B2}"/>
+                <a16:creationId xmlns:a16="http://schemas.microsoft.com/office/drawing/2014/main" id="{D1C1C0B6-C12F-5F6D-9FCE-3AB7AC2F1A2E}"/>
               </a:ext>
             </a:extLst>
           </p:cNvPr>
@@ -4543,7 +4546,7 @@
     </p:spTree>
     <p:extLst>
       <p:ext uri="{BB962C8B-B14F-4D97-AF65-F5344CB8AC3E}">
-        <p14:creationId xmlns:p14="http://schemas.microsoft.com/office/powerpoint/2010/main" val="3482951389"/>
+        <p14:creationId xmlns:p14="http://schemas.microsoft.com/office/powerpoint/2010/main" val="2180225113"/>
       </p:ext>
     </p:extLst>
   </p:cSld>
@@ -4667,7 +4670,7 @@
           <p:cNvPr id="2" name="テキスト ボックス 1">
             <a:extLst>
               <a:ext uri="{FF2B5EF4-FFF2-40B4-BE49-F238E27FC236}">
-                <a16:creationId xmlns:a16="http://schemas.microsoft.com/office/drawing/2014/main" id="{2905FEB9-46F0-97DC-D53A-B5F07621E64A}"/>
+                <a16:creationId xmlns:a16="http://schemas.microsoft.com/office/drawing/2014/main" id="{0E1DDC8D-688E-82D7-6844-7D1E05399ABA}"/>
               </a:ext>
             </a:extLst>
           </p:cNvPr>
@@ -4713,7 +4716,7 @@
           <p:cNvPr id="3" name="テキスト ボックス 2">
             <a:extLst>
               <a:ext uri="{FF2B5EF4-FFF2-40B4-BE49-F238E27FC236}">
-                <a16:creationId xmlns:a16="http://schemas.microsoft.com/office/drawing/2014/main" id="{696492C0-4350-EC91-C80F-040CD231F62C}"/>
+                <a16:creationId xmlns:a16="http://schemas.microsoft.com/office/drawing/2014/main" id="{B7A59135-15F4-719E-DAE8-16C530AF44AF}"/>
               </a:ext>
             </a:extLst>
           </p:cNvPr>
@@ -4753,7 +4756,7 @@
           <p:cNvPr id="4" name="テキスト ボックス 3">
             <a:extLst>
               <a:ext uri="{FF2B5EF4-FFF2-40B4-BE49-F238E27FC236}">
-                <a16:creationId xmlns:a16="http://schemas.microsoft.com/office/drawing/2014/main" id="{3CA4620A-A1B1-04E0-6D9A-630C7138629A}"/>
+                <a16:creationId xmlns:a16="http://schemas.microsoft.com/office/drawing/2014/main" id="{1541613F-AFE3-E1F9-03E6-BC7266511540}"/>
               </a:ext>
             </a:extLst>
           </p:cNvPr>
@@ -4863,7 +4866,7 @@
           <p:cNvPr id="5" name="テキスト ボックス 4">
             <a:extLst>
               <a:ext uri="{FF2B5EF4-FFF2-40B4-BE49-F238E27FC236}">
-                <a16:creationId xmlns:a16="http://schemas.microsoft.com/office/drawing/2014/main" id="{B27239EC-12B6-D22C-81E3-EEE14D47C099}"/>
+                <a16:creationId xmlns:a16="http://schemas.microsoft.com/office/drawing/2014/main" id="{5D406A31-9404-6617-FB42-55C2290985CB}"/>
               </a:ext>
             </a:extLst>
           </p:cNvPr>
@@ -4910,7 +4913,7 @@
             <a:hlinkClick r:id="" action="ppaction://media"/>
             <a:extLst>
               <a:ext uri="{FF2B5EF4-FFF2-40B4-BE49-F238E27FC236}">
-                <a16:creationId xmlns:a16="http://schemas.microsoft.com/office/drawing/2014/main" id="{26A46D79-1D8A-58FD-B1A9-F6DAF8BCA6CD}"/>
+                <a16:creationId xmlns:a16="http://schemas.microsoft.com/office/drawing/2014/main" id="{BAA0DBC6-CB2F-9A6B-4B69-76D5BBF76FF3}"/>
               </a:ext>
             </a:extLst>
           </p:cNvPr>
@@ -4945,7 +4948,7 @@
     </p:spTree>
     <p:extLst>
       <p:ext uri="{BB962C8B-B14F-4D97-AF65-F5344CB8AC3E}">
-        <p14:creationId xmlns:p14="http://schemas.microsoft.com/office/powerpoint/2010/main" val="2284613040"/>
+        <p14:creationId xmlns:p14="http://schemas.microsoft.com/office/powerpoint/2010/main" val="4140849787"/>
       </p:ext>
     </p:extLst>
   </p:cSld>
@@ -5069,7 +5072,7 @@
           <p:cNvPr id="2" name="テキスト ボックス 1">
             <a:extLst>
               <a:ext uri="{FF2B5EF4-FFF2-40B4-BE49-F238E27FC236}">
-                <a16:creationId xmlns:a16="http://schemas.microsoft.com/office/drawing/2014/main" id="{95316763-EB84-7D92-B86D-9054CA5A63F9}"/>
+                <a16:creationId xmlns:a16="http://schemas.microsoft.com/office/drawing/2014/main" id="{8888D14E-6036-BBCB-BF75-691BA6B9700F}"/>
               </a:ext>
             </a:extLst>
           </p:cNvPr>
@@ -5115,7 +5118,7 @@
           <p:cNvPr id="3" name="テキスト ボックス 2">
             <a:extLst>
               <a:ext uri="{FF2B5EF4-FFF2-40B4-BE49-F238E27FC236}">
-                <a16:creationId xmlns:a16="http://schemas.microsoft.com/office/drawing/2014/main" id="{3C63C838-4188-18D2-6444-E127D93BA93A}"/>
+                <a16:creationId xmlns:a16="http://schemas.microsoft.com/office/drawing/2014/main" id="{1D029778-40D1-BFA6-BA10-8C139559E4DE}"/>
               </a:ext>
             </a:extLst>
           </p:cNvPr>
@@ -5155,7 +5158,7 @@
           <p:cNvPr id="4" name="テキスト ボックス 3">
             <a:extLst>
               <a:ext uri="{FF2B5EF4-FFF2-40B4-BE49-F238E27FC236}">
-                <a16:creationId xmlns:a16="http://schemas.microsoft.com/office/drawing/2014/main" id="{3D97B853-327D-24B9-072A-DC638C85E53C}"/>
+                <a16:creationId xmlns:a16="http://schemas.microsoft.com/office/drawing/2014/main" id="{C9025AC3-65D2-9843-EDCA-2A253557ECD6}"/>
               </a:ext>
             </a:extLst>
           </p:cNvPr>
@@ -5179,20 +5182,14 @@
           <a:lstStyle/>
           <a:p>
             <a:r>
-              <a:rPr kumimoji="1" lang="en-US" altLang="ja-JP" sz="2000">
+              <a:rPr kumimoji="1" lang="ja-JP" altLang="en-US" sz="2000">
                 <a:solidFill>
                   <a:srgbClr val="333333"/>
                 </a:solidFill>
                 <a:latin typeface="Arial" panose="020B0604020202020204" pitchFamily="34" charset="0"/>
               </a:rPr>
-              <a:t>Add verified venues reviews and revenue paths</a:t>
-            </a:r>
-            <a:endParaRPr kumimoji="1" lang="ja-JP" altLang="en-US" sz="2000">
-              <a:solidFill>
-                <a:srgbClr val="333333"/>
-              </a:solidFill>
-              <a:latin typeface="Arial" panose="020B0604020202020204" pitchFamily="34" charset="0"/>
-            </a:endParaRPr>
+              <a:t>直近のコミットでは、新機能の追加と実装強化が行われました。</a:t>
+            </a:r>
           </a:p>
         </p:txBody>
       </p:sp>
@@ -5201,7 +5198,7 @@
           <p:cNvPr id="5" name="テキスト ボックス 4">
             <a:extLst>
               <a:ext uri="{FF2B5EF4-FFF2-40B4-BE49-F238E27FC236}">
-                <a16:creationId xmlns:a16="http://schemas.microsoft.com/office/drawing/2014/main" id="{84B53178-8A06-CFC3-FBEB-0927E9B185FE}"/>
+                <a16:creationId xmlns:a16="http://schemas.microsoft.com/office/drawing/2014/main" id="{38A35D80-D397-FD31-135F-B743BB7DE3C4}"/>
               </a:ext>
             </a:extLst>
           </p:cNvPr>
@@ -5248,7 +5245,7 @@
             <a:hlinkClick r:id="" action="ppaction://media"/>
             <a:extLst>
               <a:ext uri="{FF2B5EF4-FFF2-40B4-BE49-F238E27FC236}">
-                <a16:creationId xmlns:a16="http://schemas.microsoft.com/office/drawing/2014/main" id="{D3014111-8386-720D-0BA5-C559C61A50BB}"/>
+                <a16:creationId xmlns:a16="http://schemas.microsoft.com/office/drawing/2014/main" id="{6E979E92-258B-3B26-E731-CF85767F7C64}"/>
               </a:ext>
             </a:extLst>
           </p:cNvPr>
@@ -5283,7 +5280,7 @@
     </p:spTree>
     <p:extLst>
       <p:ext uri="{BB962C8B-B14F-4D97-AF65-F5344CB8AC3E}">
-        <p14:creationId xmlns:p14="http://schemas.microsoft.com/office/powerpoint/2010/main" val="1132241599"/>
+        <p14:creationId xmlns:p14="http://schemas.microsoft.com/office/powerpoint/2010/main" val="219237797"/>
       </p:ext>
     </p:extLst>
   </p:cSld>
@@ -5292,10 +5289,10 @@
   </p:clrMapOvr>
   <mc:AlternateContent xmlns:mc="http://schemas.openxmlformats.org/markup-compatibility/2006">
     <mc:Choice xmlns:p14="http://schemas.microsoft.com/office/powerpoint/2010/main" Requires="p14">
-      <p:transition spd="slow" p14:dur="2000" advTm="8000"/>
+      <p:transition spd="slow" p14:dur="2000" advTm="6000"/>
     </mc:Choice>
     <mc:Fallback>
-      <p:transition spd="slow" advTm="8000"/>
+      <p:transition spd="slow" advTm="6000"/>
     </mc:Fallback>
   </mc:AlternateContent>
   <p:timing>
@@ -5326,7 +5323,7 @@
                                   <p:childTnLst>
                                     <p:cmd type="call" cmd="playFrom(0.0)">
                                       <p:cBhvr>
-                                        <p:cTn id="6" dur="7315" fill="hold"/>
+                                        <p:cTn id="6" dur="5687" fill="hold"/>
                                         <p:tgtEl>
                                           <p:spTgt spid="6"/>
                                         </p:tgtEl>
@@ -5407,7 +5404,7 @@
           <p:cNvPr id="2" name="テキスト ボックス 1">
             <a:extLst>
               <a:ext uri="{FF2B5EF4-FFF2-40B4-BE49-F238E27FC236}">
-                <a16:creationId xmlns:a16="http://schemas.microsoft.com/office/drawing/2014/main" id="{1E8DA95E-DEAB-9B88-4035-9825465BD1AD}"/>
+                <a16:creationId xmlns:a16="http://schemas.microsoft.com/office/drawing/2014/main" id="{1F740E4B-8CD0-5D37-5409-ED3A38EDC7BF}"/>
               </a:ext>
             </a:extLst>
           </p:cNvPr>
@@ -5453,7 +5450,7 @@
           <p:cNvPr id="3" name="テキスト ボックス 2">
             <a:extLst>
               <a:ext uri="{FF2B5EF4-FFF2-40B4-BE49-F238E27FC236}">
-                <a16:creationId xmlns:a16="http://schemas.microsoft.com/office/drawing/2014/main" id="{31C8CE25-17BE-8CE0-8902-1953E8D575F5}"/>
+                <a16:creationId xmlns:a16="http://schemas.microsoft.com/office/drawing/2014/main" id="{6EDBEA7C-38FC-0F3A-4FFB-A1B74102B5D5}"/>
               </a:ext>
             </a:extLst>
           </p:cNvPr>
@@ -5493,7 +5490,7 @@
           <p:cNvPr id="4" name="テキスト ボックス 3">
             <a:extLst>
               <a:ext uri="{FF2B5EF4-FFF2-40B4-BE49-F238E27FC236}">
-                <a16:creationId xmlns:a16="http://schemas.microsoft.com/office/drawing/2014/main" id="{433C6169-736E-3E11-D336-4E2DDFA79B74}"/>
+                <a16:creationId xmlns:a16="http://schemas.microsoft.com/office/drawing/2014/main" id="{AE3AAD53-B9E6-96A0-121B-ADDAE978390D}"/>
               </a:ext>
             </a:extLst>
           </p:cNvPr>
@@ -5558,7 +5555,7 @@
           <p:cNvPr id="5" name="テキスト ボックス 4">
             <a:extLst>
               <a:ext uri="{FF2B5EF4-FFF2-40B4-BE49-F238E27FC236}">
-                <a16:creationId xmlns:a16="http://schemas.microsoft.com/office/drawing/2014/main" id="{43A17CFC-847C-CB5A-8D8B-0BA681C566FF}"/>
+                <a16:creationId xmlns:a16="http://schemas.microsoft.com/office/drawing/2014/main" id="{CC680E1E-091A-F2EC-1384-BFE6FA340D00}"/>
               </a:ext>
             </a:extLst>
           </p:cNvPr>
@@ -5605,7 +5602,7 @@
             <a:hlinkClick r:id="" action="ppaction://media"/>
             <a:extLst>
               <a:ext uri="{FF2B5EF4-FFF2-40B4-BE49-F238E27FC236}">
-                <a16:creationId xmlns:a16="http://schemas.microsoft.com/office/drawing/2014/main" id="{215AE68B-5D88-3CE6-E3C6-6FF8EA8C1B43}"/>
+                <a16:creationId xmlns:a16="http://schemas.microsoft.com/office/drawing/2014/main" id="{96681647-8788-303B-838B-EED748CD585D}"/>
               </a:ext>
             </a:extLst>
           </p:cNvPr>
@@ -5640,7 +5637,7 @@
     </p:spTree>
     <p:extLst>
       <p:ext uri="{BB962C8B-B14F-4D97-AF65-F5344CB8AC3E}">
-        <p14:creationId xmlns:p14="http://schemas.microsoft.com/office/powerpoint/2010/main" val="3839363936"/>
+        <p14:creationId xmlns:p14="http://schemas.microsoft.com/office/powerpoint/2010/main" val="3948521913"/>
       </p:ext>
     </p:extLst>
   </p:cSld>
